--- a/output/presentation/lenin_stalin_forecast_final.pptx
+++ b/output/presentation/lenin_stalin_forecast_final.pptx
@@ -3879,7 +3879,7 @@
     <p:bg>
       <p:bgPr>
         <a:solidFill xmlns:a="http://schemas.openxmlformats.org/drawingml/2006/main">
-          <a:srgbClr val="FAFAF8"/>
+          <a:srgbClr val="FFFFFF"/>
         </a:solidFill>
       </p:bgPr>
     </p:bg>
@@ -6132,7 +6132,7 @@
     <p:bg>
       <p:bgPr>
         <a:solidFill xmlns:a="http://schemas.openxmlformats.org/drawingml/2006/main">
-          <a:srgbClr val="FAFAF8"/>
+          <a:srgbClr val="FFFFFF"/>
         </a:solidFill>
       </p:bgPr>
     </p:bg>
@@ -7615,7 +7615,7 @@
     <p:bg>
       <p:bgPr>
         <a:solidFill xmlns:a="http://schemas.openxmlformats.org/drawingml/2006/main">
-          <a:srgbClr val="FAFAF8"/>
+          <a:srgbClr val="FFFFFF"/>
         </a:solidFill>
       </p:bgPr>
     </p:bg>
@@ -10568,7 +10568,7 @@
     <p:bg>
       <p:bgPr>
         <a:solidFill xmlns:a="http://schemas.openxmlformats.org/drawingml/2006/main">
-          <a:srgbClr val="FAFAF8"/>
+          <a:srgbClr val="FFFFFF"/>
         </a:solidFill>
       </p:bgPr>
     </p:bg>
@@ -12043,7 +12043,7 @@
     <p:bg>
       <p:bgPr>
         <a:solidFill xmlns:a="http://schemas.openxmlformats.org/drawingml/2006/main">
-          <a:srgbClr val="FAFAF8"/>
+          <a:srgbClr val="FFFFFF"/>
         </a:solidFill>
       </p:bgPr>
     </p:bg>
@@ -13696,7 +13696,7 @@
     <p:bg>
       <p:bgPr>
         <a:solidFill xmlns:a="http://schemas.openxmlformats.org/drawingml/2006/main">
-          <a:srgbClr val="FAFAF8"/>
+          <a:srgbClr val="FFFFFF"/>
         </a:solidFill>
       </p:bgPr>
     </p:bg>
@@ -14919,7 +14919,7 @@
     <p:bg>
       <p:bgPr>
         <a:solidFill xmlns:a="http://schemas.openxmlformats.org/drawingml/2006/main">
-          <a:srgbClr val="FAFAF8"/>
+          <a:srgbClr val="FFFFFF"/>
         </a:solidFill>
       </p:bgPr>
     </p:bg>
